--- a/lab1/Лабораторная_1_вариант_9.pptx
+++ b/lab1/Лабораторная_1_вариант_9.pptx
@@ -4985,7 +4985,7 @@
               </a:defRPr>
             </a:pPr>
             <a:r>
-              <a:t>    np.array([20, 80, 80]), np.array([35, 255, 255]))</a:t>
+              <a:t>    np.array([26, 80, 80]), np.array([35, 255, 255]))</a:t>
             </a:r>
           </a:p>
         </p:txBody>
@@ -4999,7 +4999,7 @@
         <p:spPr>
           <a:xfrm>
             <a:off x="822960" y="4846320"/>
-            <a:ext cx="5152644" cy="969264"/>
+            <a:ext cx="3355848" cy="969264"/>
           </a:xfrm>
           <a:prstGeom prst="roundRect">
             <a:avLst>
@@ -5031,7 +5031,7 @@
         <p:spPr>
           <a:xfrm>
             <a:off x="1078992" y="5038344"/>
-            <a:ext cx="4640579" cy="365760"/>
+            <a:ext cx="2843784" cy="365760"/>
           </a:xfrm>
           <a:prstGeom prst="rect">
             <a:avLst/>
@@ -5073,7 +5073,7 @@
         <p:spPr>
           <a:xfrm>
             <a:off x="1078992" y="5440680"/>
-            <a:ext cx="4640579" cy="274320"/>
+            <a:ext cx="2843784" cy="274320"/>
           </a:xfrm>
           <a:prstGeom prst="rect">
             <a:avLst/>
@@ -5114,8 +5114,8 @@
         </p:nvSpPr>
         <p:spPr>
           <a:xfrm>
-            <a:off x="6213348" y="4846320"/>
-            <a:ext cx="5152644" cy="969264"/>
+            <a:off x="4416552" y="4846320"/>
+            <a:ext cx="3355848" cy="969264"/>
           </a:xfrm>
           <a:prstGeom prst="roundRect">
             <a:avLst>
@@ -5146,8 +5146,8 @@
         </p:nvSpPr>
         <p:spPr>
           <a:xfrm>
-            <a:off x="6469380" y="5038344"/>
-            <a:ext cx="4640579" cy="365760"/>
+            <a:off x="4672584" y="5038344"/>
+            <a:ext cx="2843784" cy="365760"/>
           </a:xfrm>
           <a:prstGeom prst="rect">
             <a:avLst/>
@@ -5175,7 +5175,7 @@
               </a:defRPr>
             </a:pPr>
             <a:r>
-              <a:t>79.03 %</a:t>
+              <a:t>78.16 %</a:t>
             </a:r>
           </a:p>
         </p:txBody>
@@ -5188,8 +5188,8 @@
         </p:nvSpPr>
         <p:spPr>
           <a:xfrm>
-            <a:off x="6469380" y="5440680"/>
-            <a:ext cx="4640579" cy="274320"/>
+            <a:off x="4672584" y="5440680"/>
+            <a:ext cx="2843784" cy="274320"/>
           </a:xfrm>
           <a:prstGeom prst="rect">
             <a:avLst/>
@@ -5218,6 +5218,122 @@
             </a:pPr>
             <a:r>
               <a:t>площади кадра занимает фон</a:t>
+            </a:r>
+          </a:p>
+        </p:txBody>
+      </p:sp>
+      <p:sp>
+        <p:nvSpPr>
+          <p:cNvPr id="18" name="Rounded Rectangle 17"/>
+          <p:cNvSpPr/>
+          <p:nvPr/>
+        </p:nvSpPr>
+        <p:spPr>
+          <a:xfrm>
+            <a:off x="8010144" y="4846320"/>
+            <a:ext cx="3355848" cy="969264"/>
+          </a:xfrm>
+          <a:prstGeom prst="roundRect">
+            <a:avLst>
+              <a:gd name="adj" fmla="val 13207"/>
+            </a:avLst>
+          </a:prstGeom>
+          <a:solidFill>
+            <a:srgbClr val="F3F6FC"/>
+          </a:solidFill>
+          <a:ln>
+            <a:noFill/>
+          </a:ln>
+          <a:effectLst/>
+        </p:spPr>
+        <p:txBody>
+          <a:bodyPr rtlCol="0" anchor="ctr" wrap="square"/>
+          <a:lstStyle/>
+          <a:p>
+            <a:pPr algn="ctr"/>
+          </a:p>
+        </p:txBody>
+      </p:sp>
+      <p:sp>
+        <p:nvSpPr>
+          <p:cNvPr id="19" name="TextBox 18"/>
+          <p:cNvSpPr txBox="1"/>
+          <p:nvPr/>
+        </p:nvSpPr>
+        <p:spPr>
+          <a:xfrm>
+            <a:off x="8266175" y="5038344"/>
+            <a:ext cx="2843784" cy="365760"/>
+          </a:xfrm>
+          <a:prstGeom prst="rect">
+            <a:avLst/>
+          </a:prstGeom>
+          <a:noFill/>
+        </p:spPr>
+        <p:txBody>
+          <a:bodyPr wrap="square" lIns="0" rIns="0" tIns="0" bIns="0" anchor="t">
+            <a:spAutoFit/>
+          </a:bodyPr>
+          <a:lstStyle/>
+          <a:p>
+            <a:pPr algn="l">
+              <a:lnSpc>
+                <a:spcPct val="100000"/>
+              </a:lnSpc>
+              <a:spcAft>
+                <a:spcPts val="0"/>
+              </a:spcAft>
+              <a:defRPr sz="2500" b="1">
+                <a:solidFill>
+                  <a:srgbClr val="0B57D0"/>
+                </a:solidFill>
+                <a:latin typeface="Helvetica Neue"/>
+              </a:defRPr>
+            </a:pPr>
+            <a:r>
+              <a:t>26 … 35</a:t>
+            </a:r>
+          </a:p>
+        </p:txBody>
+      </p:sp>
+      <p:sp>
+        <p:nvSpPr>
+          <p:cNvPr id="20" name="TextBox 19"/>
+          <p:cNvSpPr txBox="1"/>
+          <p:nvPr/>
+        </p:nvSpPr>
+        <p:spPr>
+          <a:xfrm>
+            <a:off x="8266175" y="5440680"/>
+            <a:ext cx="2843784" cy="274320"/>
+          </a:xfrm>
+          <a:prstGeom prst="rect">
+            <a:avLst/>
+          </a:prstGeom>
+          <a:noFill/>
+        </p:spPr>
+        <p:txBody>
+          <a:bodyPr wrap="square" lIns="0" rIns="0" tIns="0" bIns="0" anchor="t">
+            <a:spAutoFit/>
+          </a:bodyPr>
+          <a:lstStyle/>
+          <a:p>
+            <a:pPr algn="l">
+              <a:lnSpc>
+                <a:spcPct val="118000"/>
+              </a:lnSpc>
+              <a:spcAft>
+                <a:spcPts val="0"/>
+              </a:spcAft>
+              <a:defRPr sz="1000" b="0">
+                <a:solidFill>
+                  <a:srgbClr val="5B6070"/>
+                </a:solidFill>
+                <a:latin typeface="Helvetica Neue"/>
+              </a:defRPr>
+            </a:pPr>
+            <a:r>
+              <a:t>нижняя граница поднята: у шлема H ≈ 19…25</a:t>
             </a:r>
           </a:p>
         </p:txBody>
@@ -6217,7 +6333,7 @@
               </a:defRPr>
             </a:pPr>
             <a:r>
-              <a:t>19.95 %</a:t>
+              <a:t>21.48 %</a:t>
             </a:r>
           </a:p>
         </p:txBody>
@@ -6505,11 +6621,11 @@
         <p:spPr>
           <a:xfrm>
             <a:off x="822960" y="4791456"/>
-            <a:ext cx="7360920" cy="995375"/>
+            <a:ext cx="7360920" cy="1261668"/>
           </a:xfrm>
           <a:prstGeom prst="roundRect">
             <a:avLst>
-              <a:gd name="adj" fmla="val 12861"/>
+              <a:gd name="adj" fmla="val 10146"/>
             </a:avLst>
           </a:prstGeom>
           <a:solidFill>
@@ -6537,7 +6653,7 @@
         <p:spPr>
           <a:xfrm>
             <a:off x="822960" y="5010912"/>
-            <a:ext cx="50292" cy="556463"/>
+            <a:ext cx="50292" cy="822756"/>
           </a:xfrm>
           <a:prstGeom prst="roundRect">
             <a:avLst>
@@ -6569,18 +6685,37 @@
         <p:spPr>
           <a:xfrm>
             <a:off x="1207008" y="5029200"/>
-            <a:ext cx="6702552" cy="519887"/>
-          </a:xfrm>
-          <a:prstGeom prst="rect">
-            <a:avLst/>
-          </a:prstGeom>
-          <a:noFill/>
-        </p:spPr>
-        <p:txBody>
-          <a:bodyPr wrap="square" lIns="0" rIns="0" tIns="0" bIns="0" anchor="t">
-            <a:spAutoFit/>
-          </a:bodyPr>
-          <a:lstStyle/>
+            <a:ext cx="6702552" cy="786180"/>
+          </a:xfrm>
+          <a:prstGeom prst="rect">
+            <a:avLst/>
+          </a:prstGeom>
+          <a:noFill/>
+        </p:spPr>
+        <p:txBody>
+          <a:bodyPr wrap="square" lIns="0" rIns="0" tIns="0" bIns="0" anchor="t">
+            <a:spAutoFit/>
+          </a:bodyPr>
+          <a:lstStyle/>
+          <a:p>
+            <a:pPr algn="l">
+              <a:lnSpc>
+                <a:spcPct val="128000"/>
+              </a:lnSpc>
+              <a:spcAft>
+                <a:spcPts val="100"/>
+              </a:spcAft>
+              <a:defRPr sz="1300" b="0">
+                <a:solidFill>
+                  <a:srgbClr val="15171C"/>
+                </a:solidFill>
+                <a:latin typeface="Menlo"/>
+              </a:defRPr>
+            </a:pPr>
+            <a:r>
+              <a:t>alpha = cv2.bitwise_not(yellow_mask)</a:t>
+            </a:r>
+          </a:p>
           <a:p>
             <a:pPr algn="l">
               <a:lnSpc>
@@ -7880,7 +8015,7 @@
               </a:defRPr>
             </a:pPr>
             <a:r>
-              <a:t>Фон выделен одним диапазоном тона: 79.03 % площади</a:t>
+              <a:t>Фон выделен одним диапазоном тона: 78.16 % площади</a:t>
             </a:r>
           </a:p>
         </p:txBody>
@@ -8028,7 +8163,7 @@
               </a:defRPr>
             </a:pPr>
             <a:r>
-              <a:t>Получен PNG с альфа-каналом: непрозрачны 19.95 % пикселей</a:t>
+              <a:t>Получен PNG с альфа-каналом: непрозрачны 21.48 % пикселей</a:t>
             </a:r>
           </a:p>
         </p:txBody>
